--- a/SIH26 badminton proj v1/SIH PPT/SIH26 final ppt.pptx
+++ b/SIH26 badminton proj v1/SIH PPT/SIH26 final ppt.pptx
@@ -5798,8 +5798,8 @@
         </p:nvSpPr>
         <p:spPr>
           <a:xfrm>
-            <a:off x="4273994" y="925233"/>
-            <a:ext cx="7722415" cy="2792161"/>
+            <a:off x="4287450" y="905560"/>
+            <a:ext cx="7722415" cy="2574788"/>
           </a:xfrm>
           <a:prstGeom prst="rect">
             <a:avLst/>
@@ -6636,7 +6636,7 @@
         <p:spPr>
           <a:xfrm>
             <a:off x="4273994" y="1269065"/>
-            <a:ext cx="7567486" cy="2308324"/>
+            <a:ext cx="7567486" cy="2062103"/>
           </a:xfrm>
           <a:prstGeom prst="rect">
             <a:avLst/>
@@ -6706,24 +6706,7 @@
                 <a:latin typeface="Times New Roman" panose="02020603050405020304" pitchFamily="18" charset="0"/>
                 <a:cs typeface="Times New Roman" panose="02020603050405020304" pitchFamily="18" charset="0"/>
               </a:rPr>
-              <a:t>4. Smart Player Profiling</a:t>
-            </a:r>
-            <a:r>
-              <a:rPr lang="en-IN" sz="1600" dirty="0">
-                <a:latin typeface="Times New Roman" panose="02020603050405020304" pitchFamily="18" charset="0"/>
-                <a:cs typeface="Times New Roman" panose="02020603050405020304" pitchFamily="18" charset="0"/>
-              </a:rPr>
-              <a:t> – Combine session and benchmark data for player insights.</a:t>
-            </a:r>
-          </a:p>
-          <a:p>
-            <a:pPr lvl="0" algn="just"/>
-            <a:r>
-              <a:rPr lang="en-IN" sz="1600" b="1" dirty="0">
-                <a:latin typeface="Times New Roman" panose="02020603050405020304" pitchFamily="18" charset="0"/>
-                <a:cs typeface="Times New Roman" panose="02020603050405020304" pitchFamily="18" charset="0"/>
-              </a:rPr>
-              <a:t>5. Affordable Smart-Racket Platform</a:t>
+              <a:t>4. Affordable Smart-Racket Platform</a:t>
             </a:r>
             <a:r>
               <a:rPr lang="en-IN" sz="1600" dirty="0">
